--- a/tutorial/T03/tut03.pptx
+++ b/tutorial/T03/tut03.pptx
@@ -3795,7 +3795,7 @@
           </a:ln>
           <a:extLst>
             <a:ext uri="{C572A759-6A51-4108-AA02-DFA0A04FC94B}">
-              <ma14:wrappingTextBoxFlag xmlns="" xmlns:ma14="http://schemas.microsoft.com/office/mac/drawingml/2011/main" xmlns:a14="http://schemas.microsoft.com/office/drawing/2010/main" xmlns:m="http://schemas.openxmlformats.org/officeDocument/2006/math" val="1"/>
+              <ma14:wrappingTextBoxFlag xmlns:m="http://schemas.openxmlformats.org/officeDocument/2006/math" xmlns:a14="http://schemas.microsoft.com/office/drawing/2010/main" xmlns:ma14="http://schemas.microsoft.com/office/mac/drawingml/2011/main" xmlns="" val="1"/>
             </a:ext>
           </a:extLst>
         </p:spPr>
@@ -3834,7 +3834,7 @@
           </a:ln>
           <a:extLst>
             <a:ext uri="{C572A759-6A51-4108-AA02-DFA0A04FC94B}">
-              <ma14:wrappingTextBoxFlag xmlns="" xmlns:ma14="http://schemas.microsoft.com/office/mac/drawingml/2011/main" xmlns:a14="http://schemas.microsoft.com/office/drawing/2010/main" xmlns:m="http://schemas.openxmlformats.org/officeDocument/2006/math" val="1"/>
+              <ma14:wrappingTextBoxFlag xmlns:m="http://schemas.openxmlformats.org/officeDocument/2006/math" xmlns:a14="http://schemas.microsoft.com/office/drawing/2010/main" xmlns:ma14="http://schemas.microsoft.com/office/mac/drawingml/2011/main" xmlns="" val="1"/>
             </a:ext>
           </a:extLst>
         </p:spPr>
@@ -15142,7 +15142,7 @@
                 </a:solidFill>
                 <a:latin typeface="Consolas" panose="020B0609020204030204" pitchFamily="49" charset="0"/>
               </a:rPr>
-              <a:t>==</a:t>
+              <a:t>&gt;</a:t>
             </a:r>
             <a:r>
               <a:rPr lang="en-HK" sz="1050" dirty="0">
@@ -15535,7 +15535,7 @@
                 </a:solidFill>
                 <a:latin typeface="Consolas" panose="020B0609020204030204" pitchFamily="49" charset="0"/>
               </a:rPr>
-              <a:t>&gt;</a:t>
+              <a:t>==</a:t>
             </a:r>
             <a:r>
               <a:rPr lang="en-HK" sz="1050" dirty="0">
@@ -15639,13 +15639,31 @@
               <a:t>,</a:t>
             </a:r>
             <a:r>
-              <a:rPr lang="en-HK" sz="1050" dirty="0" err="1">
-                <a:solidFill>
-                  <a:srgbClr val="292929"/>
-                </a:solidFill>
-                <a:latin typeface="Consolas" panose="020B0609020204030204" pitchFamily="49" charset="0"/>
-              </a:rPr>
-              <a:t>pid</a:t>
+              <a:rPr lang="en-HK" sz="1050" dirty="0">
+                <a:solidFill>
+                  <a:srgbClr val="5E2CBC"/>
+                </a:solidFill>
+                <a:latin typeface="Consolas" panose="020B0609020204030204" pitchFamily="49" charset="0"/>
+              </a:rPr>
+              <a:t> </a:t>
+            </a:r>
+            <a:r>
+              <a:rPr lang="en-US" altLang="zh-CN" sz="1050" dirty="0" err="1">
+                <a:solidFill>
+                  <a:srgbClr val="5E2CBC"/>
+                </a:solidFill>
+                <a:latin typeface="Consolas" panose="020B0609020204030204" pitchFamily="49" charset="0"/>
+              </a:rPr>
+              <a:t>getpid</a:t>
+            </a:r>
+            <a:r>
+              <a:rPr lang="en-HK" altLang="zh-CN" sz="1050" dirty="0">
+                <a:solidFill>
+                  <a:srgbClr val="292929"/>
+                </a:solidFill>
+                <a:latin typeface="Consolas" panose="020B0609020204030204" pitchFamily="49" charset="0"/>
+              </a:rPr>
+              <a:t>()</a:t>
             </a:r>
             <a:r>
               <a:rPr lang="en-HK" sz="1050" dirty="0">

--- a/tutorial/T03/tut03.pptx
+++ b/tutorial/T03/tut03.pptx
@@ -217,7 +217,7 @@
           <a:p>
             <a:fld id="{90751E9F-A845-4914-A3CC-CC345012599B}" type="datetimeFigureOut">
               <a:rPr lang="en-US" smtClean="0"/>
-              <a:t>1/19/2026</a:t>
+              <a:t>1/22/2026</a:t>
             </a:fld>
             <a:endParaRPr lang="en-US"/>
           </a:p>
@@ -2353,7 +2353,7 @@
           <a:p>
             <a:fld id="{4110DD41-9B81-A544-8498-92133950A0E4}" type="datetime1">
               <a:rPr lang="en-US" smtClean="0"/>
-              <a:t>1/19/2026</a:t>
+              <a:t>1/22/2026</a:t>
             </a:fld>
             <a:endParaRPr lang="en-US"/>
           </a:p>
@@ -3795,7 +3795,7 @@
           </a:ln>
           <a:extLst>
             <a:ext uri="{C572A759-6A51-4108-AA02-DFA0A04FC94B}">
-              <ma14:wrappingTextBoxFlag xmlns:m="http://schemas.openxmlformats.org/officeDocument/2006/math" xmlns:a14="http://schemas.microsoft.com/office/drawing/2010/main" xmlns:ma14="http://schemas.microsoft.com/office/mac/drawingml/2011/main" xmlns="" val="1"/>
+              <ma14:wrappingTextBoxFlag xmlns="" xmlns:ma14="http://schemas.microsoft.com/office/mac/drawingml/2011/main" xmlns:a14="http://schemas.microsoft.com/office/drawing/2010/main" xmlns:m="http://schemas.openxmlformats.org/officeDocument/2006/math" val="1"/>
             </a:ext>
           </a:extLst>
         </p:spPr>
@@ -3834,7 +3834,7 @@
           </a:ln>
           <a:extLst>
             <a:ext uri="{C572A759-6A51-4108-AA02-DFA0A04FC94B}">
-              <ma14:wrappingTextBoxFlag xmlns:m="http://schemas.openxmlformats.org/officeDocument/2006/math" xmlns:a14="http://schemas.microsoft.com/office/drawing/2010/main" xmlns:ma14="http://schemas.microsoft.com/office/mac/drawingml/2011/main" xmlns="" val="1"/>
+              <ma14:wrappingTextBoxFlag xmlns="" xmlns:ma14="http://schemas.microsoft.com/office/mac/drawingml/2011/main" xmlns:a14="http://schemas.microsoft.com/office/drawing/2010/main" xmlns:m="http://schemas.openxmlformats.org/officeDocument/2006/math" val="1"/>
             </a:ext>
           </a:extLst>
         </p:spPr>
@@ -18725,7 +18725,7 @@
           <a:lstStyle/>
           <a:p>
             <a:r>
-              <a:rPr lang="en-HK" sz="1400">
+              <a:rPr lang="en-HK" sz="1400" dirty="0">
                 <a:solidFill>
                   <a:srgbClr val="B5200D"/>
                 </a:solidFill>
@@ -18734,15 +18734,33 @@
               <a:t>#include</a:t>
             </a:r>
             <a:r>
-              <a:rPr lang="en-HK" sz="1400">
+              <a:rPr lang="en-HK" sz="1400" dirty="0">
                 <a:solidFill>
                   <a:srgbClr val="0F4A85"/>
                 </a:solidFill>
                 <a:latin typeface="Consolas" panose="020B0609020204030204" pitchFamily="49" charset="0"/>
               </a:rPr>
-              <a:t> &lt;sys/wait.h&gt;</a:t>
-            </a:r>
-            <a:endParaRPr lang="en-HK" sz="1400">
+              <a:t> &lt;sys/</a:t>
+            </a:r>
+            <a:r>
+              <a:rPr lang="en-HK" sz="1400" dirty="0" err="1">
+                <a:solidFill>
+                  <a:srgbClr val="0F4A85"/>
+                </a:solidFill>
+                <a:latin typeface="Consolas" panose="020B0609020204030204" pitchFamily="49" charset="0"/>
+              </a:rPr>
+              <a:t>wait.h</a:t>
+            </a:r>
+            <a:r>
+              <a:rPr lang="en-HK" sz="1400" dirty="0">
+                <a:solidFill>
+                  <a:srgbClr val="0F4A85"/>
+                </a:solidFill>
+                <a:latin typeface="Consolas" panose="020B0609020204030204" pitchFamily="49" charset="0"/>
+              </a:rPr>
+              <a:t>&gt;</a:t>
+            </a:r>
+            <a:endParaRPr lang="en-HK" sz="1400" dirty="0">
               <a:solidFill>
                 <a:srgbClr val="292929"/>
               </a:solidFill>
@@ -18751,7 +18769,7 @@
           </a:p>
           <a:p>
             <a:r>
-              <a:rPr lang="en-HK" sz="1400">
+              <a:rPr lang="en-HK" sz="1400" dirty="0">
                 <a:solidFill>
                   <a:srgbClr val="B5200D"/>
                 </a:solidFill>
@@ -18760,15 +18778,33 @@
               <a:t>#include</a:t>
             </a:r>
             <a:r>
-              <a:rPr lang="en-HK" sz="1400">
+              <a:rPr lang="en-HK" sz="1400" dirty="0">
                 <a:solidFill>
                   <a:srgbClr val="0F4A85"/>
                 </a:solidFill>
                 <a:latin typeface="Consolas" panose="020B0609020204030204" pitchFamily="49" charset="0"/>
               </a:rPr>
-              <a:t> &lt;stdio.h&gt;</a:t>
-            </a:r>
-            <a:endParaRPr lang="en-HK" sz="1400">
+              <a:t> &lt;</a:t>
+            </a:r>
+            <a:r>
+              <a:rPr lang="en-HK" sz="1400" dirty="0" err="1">
+                <a:solidFill>
+                  <a:srgbClr val="0F4A85"/>
+                </a:solidFill>
+                <a:latin typeface="Consolas" panose="020B0609020204030204" pitchFamily="49" charset="0"/>
+              </a:rPr>
+              <a:t>stdio.h</a:t>
+            </a:r>
+            <a:r>
+              <a:rPr lang="en-HK" sz="1400" dirty="0">
+                <a:solidFill>
+                  <a:srgbClr val="0F4A85"/>
+                </a:solidFill>
+                <a:latin typeface="Consolas" panose="020B0609020204030204" pitchFamily="49" charset="0"/>
+              </a:rPr>
+              <a:t>&gt;</a:t>
+            </a:r>
+            <a:endParaRPr lang="en-HK" sz="1400" dirty="0">
               <a:solidFill>
                 <a:srgbClr val="292929"/>
               </a:solidFill>
@@ -18777,7 +18813,7 @@
           </a:p>
           <a:p>
             <a:r>
-              <a:rPr lang="en-HK" sz="1400">
+              <a:rPr lang="en-HK" sz="1400" dirty="0">
                 <a:solidFill>
                   <a:srgbClr val="B5200D"/>
                 </a:solidFill>
@@ -18786,15 +18822,33 @@
               <a:t>#include</a:t>
             </a:r>
             <a:r>
-              <a:rPr lang="en-HK" sz="1400">
+              <a:rPr lang="en-HK" sz="1400" dirty="0">
                 <a:solidFill>
                   <a:srgbClr val="0F4A85"/>
                 </a:solidFill>
                 <a:latin typeface="Consolas" panose="020B0609020204030204" pitchFamily="49" charset="0"/>
               </a:rPr>
-              <a:t> &lt;stdlib.h&gt;</a:t>
-            </a:r>
-            <a:endParaRPr lang="en-HK" sz="1400">
+              <a:t> &lt;</a:t>
+            </a:r>
+            <a:r>
+              <a:rPr lang="en-HK" sz="1400" dirty="0" err="1">
+                <a:solidFill>
+                  <a:srgbClr val="0F4A85"/>
+                </a:solidFill>
+                <a:latin typeface="Consolas" panose="020B0609020204030204" pitchFamily="49" charset="0"/>
+              </a:rPr>
+              <a:t>stdlib.h</a:t>
+            </a:r>
+            <a:r>
+              <a:rPr lang="en-HK" sz="1400" dirty="0">
+                <a:solidFill>
+                  <a:srgbClr val="0F4A85"/>
+                </a:solidFill>
+                <a:latin typeface="Consolas" panose="020B0609020204030204" pitchFamily="49" charset="0"/>
+              </a:rPr>
+              <a:t>&gt;</a:t>
+            </a:r>
+            <a:endParaRPr lang="en-HK" sz="1400" dirty="0">
               <a:solidFill>
                 <a:srgbClr val="292929"/>
               </a:solidFill>
@@ -18803,7 +18857,7 @@
           </a:p>
           <a:p>
             <a:r>
-              <a:rPr lang="en-HK" sz="1400">
+              <a:rPr lang="en-HK" sz="1400" dirty="0">
                 <a:solidFill>
                   <a:srgbClr val="B5200D"/>
                 </a:solidFill>
@@ -18812,15 +18866,33 @@
               <a:t>#include</a:t>
             </a:r>
             <a:r>
-              <a:rPr lang="en-HK" sz="1400">
+              <a:rPr lang="en-HK" sz="1400" dirty="0">
                 <a:solidFill>
                   <a:srgbClr val="0F4A85"/>
                 </a:solidFill>
                 <a:latin typeface="Consolas" panose="020B0609020204030204" pitchFamily="49" charset="0"/>
               </a:rPr>
-              <a:t> &lt;unistd.h&gt;</a:t>
-            </a:r>
-            <a:endParaRPr lang="en-HK" sz="1400">
+              <a:t> &lt;</a:t>
+            </a:r>
+            <a:r>
+              <a:rPr lang="en-HK" sz="1400" dirty="0" err="1">
+                <a:solidFill>
+                  <a:srgbClr val="0F4A85"/>
+                </a:solidFill>
+                <a:latin typeface="Consolas" panose="020B0609020204030204" pitchFamily="49" charset="0"/>
+              </a:rPr>
+              <a:t>unistd.h</a:t>
+            </a:r>
+            <a:r>
+              <a:rPr lang="en-HK" sz="1400" dirty="0">
+                <a:solidFill>
+                  <a:srgbClr val="0F4A85"/>
+                </a:solidFill>
+                <a:latin typeface="Consolas" panose="020B0609020204030204" pitchFamily="49" charset="0"/>
+              </a:rPr>
+              <a:t>&gt;</a:t>
+            </a:r>
+            <a:endParaRPr lang="en-HK" sz="1400" dirty="0">
               <a:solidFill>
                 <a:srgbClr val="292929"/>
               </a:solidFill>
@@ -18829,7 +18901,7 @@
           </a:p>
           <a:p>
             <a:br>
-              <a:rPr lang="en-HK" sz="1400">
+              <a:rPr lang="en-HK" sz="1400" dirty="0">
                 <a:solidFill>
                   <a:srgbClr val="292929"/>
                 </a:solidFill>
@@ -18837,7 +18909,7 @@
               </a:rPr>
             </a:br>
             <a:r>
-              <a:rPr lang="en-HK" sz="1400">
+              <a:rPr lang="en-HK" sz="1400" dirty="0">
                 <a:solidFill>
                   <a:srgbClr val="0F4A85"/>
                 </a:solidFill>
@@ -18846,7 +18918,7 @@
               <a:t>int</a:t>
             </a:r>
             <a:r>
-              <a:rPr lang="en-HK" sz="1400">
+              <a:rPr lang="en-HK" sz="1400" dirty="0">
                 <a:solidFill>
                   <a:srgbClr val="292929"/>
                 </a:solidFill>
@@ -18855,7 +18927,7 @@
               <a:t> </a:t>
             </a:r>
             <a:r>
-              <a:rPr lang="en-HK" sz="1400">
+              <a:rPr lang="en-HK" sz="1400" dirty="0">
                 <a:solidFill>
                   <a:srgbClr val="5E2CBC"/>
                 </a:solidFill>
@@ -18864,7 +18936,7 @@
               <a:t>main</a:t>
             </a:r>
             <a:r>
-              <a:rPr lang="en-HK" sz="1400">
+              <a:rPr lang="en-HK" sz="1400" dirty="0">
                 <a:solidFill>
                   <a:srgbClr val="292929"/>
                 </a:solidFill>
@@ -18875,7 +18947,7 @@
           </a:p>
           <a:p>
             <a:br>
-              <a:rPr lang="en-HK" sz="1400">
+              <a:rPr lang="en-HK" sz="1400" dirty="0">
                 <a:solidFill>
                   <a:srgbClr val="292929"/>
                 </a:solidFill>
@@ -18883,7 +18955,7 @@
               </a:rPr>
             </a:br>
             <a:r>
-              <a:rPr lang="en-HK" sz="1400">
+              <a:rPr lang="en-HK" sz="1400" dirty="0">
                 <a:solidFill>
                   <a:srgbClr val="292929"/>
                 </a:solidFill>
@@ -18892,7 +18964,7 @@
               <a:t>    </a:t>
             </a:r>
             <a:r>
-              <a:rPr lang="en-HK" sz="1400">
+              <a:rPr lang="en-HK" sz="1400" dirty="0" err="1">
                 <a:solidFill>
                   <a:srgbClr val="0F4A85"/>
                 </a:solidFill>
@@ -18901,27 +18973,63 @@
               <a:t>pid_t</a:t>
             </a:r>
             <a:r>
-              <a:rPr lang="en-HK" sz="1400">
-                <a:solidFill>
-                  <a:srgbClr val="292929"/>
-                </a:solidFill>
-                <a:latin typeface="Consolas" panose="020B0609020204030204" pitchFamily="49" charset="0"/>
-              </a:rPr>
-              <a:t> pid;</a:t>
-            </a:r>
-          </a:p>
-          <a:p>
-            <a:r>
-              <a:rPr lang="en-HK" sz="1400">
-                <a:solidFill>
-                  <a:srgbClr val="292929"/>
-                </a:solidFill>
-                <a:latin typeface="Consolas" panose="020B0609020204030204" pitchFamily="49" charset="0"/>
-              </a:rPr>
-              <a:t>    pid </a:t>
-            </a:r>
-            <a:r>
-              <a:rPr lang="en-HK" sz="1400">
+              <a:rPr lang="en-HK" sz="1400" dirty="0">
+                <a:solidFill>
+                  <a:srgbClr val="292929"/>
+                </a:solidFill>
+                <a:latin typeface="Consolas" panose="020B0609020204030204" pitchFamily="49" charset="0"/>
+              </a:rPr>
+              <a:t> </a:t>
+            </a:r>
+            <a:r>
+              <a:rPr lang="en-HK" sz="1400" dirty="0" err="1">
+                <a:solidFill>
+                  <a:srgbClr val="292929"/>
+                </a:solidFill>
+                <a:latin typeface="Consolas" panose="020B0609020204030204" pitchFamily="49" charset="0"/>
+              </a:rPr>
+              <a:t>pid</a:t>
+            </a:r>
+            <a:r>
+              <a:rPr lang="en-HK" sz="1400" dirty="0">
+                <a:solidFill>
+                  <a:srgbClr val="292929"/>
+                </a:solidFill>
+                <a:latin typeface="Consolas" panose="020B0609020204030204" pitchFamily="49" charset="0"/>
+              </a:rPr>
+              <a:t>;</a:t>
+            </a:r>
+          </a:p>
+          <a:p>
+            <a:r>
+              <a:rPr lang="en-HK" sz="1400" dirty="0">
+                <a:solidFill>
+                  <a:srgbClr val="292929"/>
+                </a:solidFill>
+                <a:latin typeface="Consolas" panose="020B0609020204030204" pitchFamily="49" charset="0"/>
+              </a:rPr>
+              <a:t>    </a:t>
+            </a:r>
+            <a:r>
+              <a:rPr lang="en-HK" sz="1400" dirty="0" err="1">
+                <a:solidFill>
+                  <a:srgbClr val="292929"/>
+                </a:solidFill>
+                <a:latin typeface="Consolas" panose="020B0609020204030204" pitchFamily="49" charset="0"/>
+              </a:rPr>
+              <a:t>pid</a:t>
+            </a:r>
+            <a:r>
+              <a:rPr lang="en-HK" sz="1400" dirty="0">
+                <a:solidFill>
+                  <a:srgbClr val="292929"/>
+                </a:solidFill>
+                <a:latin typeface="Consolas" panose="020B0609020204030204" pitchFamily="49" charset="0"/>
+              </a:rPr>
+              <a:t> </a:t>
+            </a:r>
+            <a:r>
+              <a:rPr lang="en-HK" sz="1400" dirty="0">
                 <a:solidFill>
                   <a:srgbClr val="000000"/>
                 </a:solidFill>
@@ -18930,7 +19038,7 @@
               <a:t>=</a:t>
             </a:r>
             <a:r>
-              <a:rPr lang="en-HK" sz="1400">
+              <a:rPr lang="en-HK" sz="1400" dirty="0">
                 <a:solidFill>
                   <a:srgbClr val="292929"/>
                 </a:solidFill>
@@ -18939,7 +19047,7 @@
               <a:t> </a:t>
             </a:r>
             <a:r>
-              <a:rPr lang="en-HK" sz="1400">
+              <a:rPr lang="en-HK" sz="1400" dirty="0">
                 <a:solidFill>
                   <a:srgbClr val="5E2CBC"/>
                 </a:solidFill>
@@ -18948,7 +19056,7 @@
               <a:t>fork</a:t>
             </a:r>
             <a:r>
-              <a:rPr lang="en-HK" sz="1400">
+              <a:rPr lang="en-HK" sz="1400" dirty="0">
                 <a:solidFill>
                   <a:srgbClr val="292929"/>
                 </a:solidFill>
@@ -18959,7 +19067,7 @@
           </a:p>
           <a:p>
             <a:r>
-              <a:rPr lang="en-HK" sz="1400">
+              <a:rPr lang="en-HK" sz="1400" dirty="0">
                 <a:solidFill>
                   <a:srgbClr val="292929"/>
                 </a:solidFill>
@@ -18968,7 +19076,7 @@
               <a:t>    </a:t>
             </a:r>
             <a:r>
-              <a:rPr lang="en-HK" sz="1400">
+              <a:rPr lang="en-HK" sz="1400" dirty="0">
                 <a:solidFill>
                   <a:srgbClr val="B5200D"/>
                 </a:solidFill>
@@ -18977,16 +19085,34 @@
               <a:t>if</a:t>
             </a:r>
             <a:r>
-              <a:rPr lang="en-HK" sz="1400">
-                <a:solidFill>
-                  <a:srgbClr val="292929"/>
-                </a:solidFill>
-                <a:latin typeface="Consolas" panose="020B0609020204030204" pitchFamily="49" charset="0"/>
-              </a:rPr>
-              <a:t>(pid </a:t>
-            </a:r>
-            <a:r>
-              <a:rPr lang="en-HK" sz="1400">
+              <a:rPr lang="en-HK" sz="1400" dirty="0">
+                <a:solidFill>
+                  <a:srgbClr val="292929"/>
+                </a:solidFill>
+                <a:latin typeface="Consolas" panose="020B0609020204030204" pitchFamily="49" charset="0"/>
+              </a:rPr>
+              <a:t>(</a:t>
+            </a:r>
+            <a:r>
+              <a:rPr lang="en-HK" sz="1400" dirty="0" err="1">
+                <a:solidFill>
+                  <a:srgbClr val="292929"/>
+                </a:solidFill>
+                <a:latin typeface="Consolas" panose="020B0609020204030204" pitchFamily="49" charset="0"/>
+              </a:rPr>
+              <a:t>pid</a:t>
+            </a:r>
+            <a:r>
+              <a:rPr lang="en-HK" sz="1400" dirty="0">
+                <a:solidFill>
+                  <a:srgbClr val="292929"/>
+                </a:solidFill>
+                <a:latin typeface="Consolas" panose="020B0609020204030204" pitchFamily="49" charset="0"/>
+              </a:rPr>
+              <a:t> </a:t>
+            </a:r>
+            <a:r>
+              <a:rPr lang="en-HK" sz="1400" dirty="0">
                 <a:solidFill>
                   <a:srgbClr val="000000"/>
                 </a:solidFill>
@@ -18995,7 +19121,7 @@
               <a:t>==</a:t>
             </a:r>
             <a:r>
-              <a:rPr lang="en-HK" sz="1400">
+              <a:rPr lang="en-HK" sz="1400" dirty="0">
                 <a:solidFill>
                   <a:srgbClr val="292929"/>
                 </a:solidFill>
@@ -19004,7 +19130,7 @@
               <a:t> </a:t>
             </a:r>
             <a:r>
-              <a:rPr lang="en-HK" sz="1400">
+              <a:rPr lang="en-HK" sz="1400" dirty="0">
                 <a:solidFill>
                   <a:srgbClr val="000000"/>
                 </a:solidFill>
@@ -19013,7 +19139,7 @@
               <a:t>-</a:t>
             </a:r>
             <a:r>
-              <a:rPr lang="en-HK" sz="1400">
+              <a:rPr lang="en-HK" sz="1400" dirty="0">
                 <a:solidFill>
                   <a:srgbClr val="096D48"/>
                 </a:solidFill>
@@ -19022,7 +19148,7 @@
               <a:t>1</a:t>
             </a:r>
             <a:r>
-              <a:rPr lang="en-HK" sz="1400">
+              <a:rPr lang="en-HK" sz="1400" dirty="0">
                 <a:solidFill>
                   <a:srgbClr val="292929"/>
                 </a:solidFill>
@@ -19033,7 +19159,7 @@
           </a:p>
           <a:p>
             <a:r>
-              <a:rPr lang="en-HK" sz="1400">
+              <a:rPr lang="en-HK" sz="1400" dirty="0">
                 <a:solidFill>
                   <a:srgbClr val="292929"/>
                 </a:solidFill>
@@ -19042,7 +19168,7 @@
               <a:t>        </a:t>
             </a:r>
             <a:r>
-              <a:rPr lang="en-HK" sz="1400">
+              <a:rPr lang="en-HK" sz="1400" dirty="0" err="1">
                 <a:solidFill>
                   <a:srgbClr val="5E2CBC"/>
                 </a:solidFill>
@@ -19051,7 +19177,7 @@
               <a:t>printf</a:t>
             </a:r>
             <a:r>
-              <a:rPr lang="en-HK" sz="1400">
+              <a:rPr lang="en-HK" sz="1400" dirty="0">
                 <a:solidFill>
                   <a:srgbClr val="292929"/>
                 </a:solidFill>
@@ -19060,7 +19186,7 @@
               <a:t>(</a:t>
             </a:r>
             <a:r>
-              <a:rPr lang="en-HK" sz="1400">
+              <a:rPr lang="en-HK" sz="1400" dirty="0">
                 <a:solidFill>
                   <a:srgbClr val="0F4A85"/>
                 </a:solidFill>
@@ -19069,7 +19195,7 @@
               <a:t>"Fork error</a:t>
             </a:r>
             <a:r>
-              <a:rPr lang="en-HK" sz="1400">
+              <a:rPr lang="en-HK" sz="1400" dirty="0">
                 <a:solidFill>
                   <a:srgbClr val="EE0000"/>
                 </a:solidFill>
@@ -19078,7 +19204,7 @@
               <a:t>\n</a:t>
             </a:r>
             <a:r>
-              <a:rPr lang="en-HK" sz="1400">
+              <a:rPr lang="en-HK" sz="1400" dirty="0">
                 <a:solidFill>
                   <a:srgbClr val="0F4A85"/>
                 </a:solidFill>
@@ -19087,7 +19213,7 @@
               <a:t>"</a:t>
             </a:r>
             <a:r>
-              <a:rPr lang="en-HK" sz="1400">
+              <a:rPr lang="en-HK" sz="1400" dirty="0">
                 <a:solidFill>
                   <a:srgbClr val="292929"/>
                 </a:solidFill>
@@ -19098,7 +19224,7 @@
           </a:p>
           <a:p>
             <a:r>
-              <a:rPr lang="en-HK" sz="1400">
+              <a:rPr lang="en-HK" sz="1400" dirty="0">
                 <a:solidFill>
                   <a:srgbClr val="292929"/>
                 </a:solidFill>
@@ -19107,7 +19233,7 @@
               <a:t>        </a:t>
             </a:r>
             <a:r>
-              <a:rPr lang="en-HK" sz="1400">
+              <a:rPr lang="en-HK" sz="1400" dirty="0">
                 <a:solidFill>
                   <a:srgbClr val="5E2CBC"/>
                 </a:solidFill>
@@ -19116,7 +19242,7 @@
               <a:t>exit</a:t>
             </a:r>
             <a:r>
-              <a:rPr lang="en-HK" sz="1400">
+              <a:rPr lang="en-HK" sz="1400" dirty="0">
                 <a:solidFill>
                   <a:srgbClr val="292929"/>
                 </a:solidFill>
@@ -19125,7 +19251,7 @@
               <a:t>(</a:t>
             </a:r>
             <a:r>
-              <a:rPr lang="en-HK" sz="1400">
+              <a:rPr lang="en-HK" sz="1400" dirty="0">
                 <a:solidFill>
                   <a:srgbClr val="000000"/>
                 </a:solidFill>
@@ -19134,7 +19260,7 @@
               <a:t>-</a:t>
             </a:r>
             <a:r>
-              <a:rPr lang="en-HK" sz="1400">
+              <a:rPr lang="en-HK" sz="1400" dirty="0">
                 <a:solidFill>
                   <a:srgbClr val="096D48"/>
                 </a:solidFill>
@@ -19143,7 +19269,7 @@
               <a:t>1</a:t>
             </a:r>
             <a:r>
-              <a:rPr lang="en-HK" sz="1400">
+              <a:rPr lang="en-HK" sz="1400" dirty="0">
                 <a:solidFill>
                   <a:srgbClr val="292929"/>
                 </a:solidFill>
@@ -19154,7 +19280,7 @@
           </a:p>
           <a:p>
             <a:r>
-              <a:rPr lang="en-HK" sz="1400">
+              <a:rPr lang="en-HK" sz="1400" dirty="0">
                 <a:solidFill>
                   <a:srgbClr val="292929"/>
                 </a:solidFill>
@@ -19165,7 +19291,7 @@
           </a:p>
           <a:p>
             <a:r>
-              <a:rPr lang="en-HK" sz="1400">
+              <a:rPr lang="en-HK" sz="1400" dirty="0">
                 <a:solidFill>
                   <a:srgbClr val="292929"/>
                 </a:solidFill>
@@ -19174,7 +19300,7 @@
               <a:t>    </a:t>
             </a:r>
             <a:r>
-              <a:rPr lang="en-HK" sz="1400">
+              <a:rPr lang="en-HK" sz="1400" dirty="0">
                 <a:solidFill>
                   <a:srgbClr val="B5200D"/>
                 </a:solidFill>
@@ -19183,7 +19309,7 @@
               <a:t>else</a:t>
             </a:r>
             <a:r>
-              <a:rPr lang="en-HK" sz="1400">
+              <a:rPr lang="en-HK" sz="1400" dirty="0">
                 <a:solidFill>
                   <a:srgbClr val="292929"/>
                 </a:solidFill>
@@ -19192,7 +19318,7 @@
               <a:t> </a:t>
             </a:r>
             <a:r>
-              <a:rPr lang="en-HK" sz="1400">
+              <a:rPr lang="en-HK" sz="1400" dirty="0">
                 <a:solidFill>
                   <a:srgbClr val="B5200D"/>
                 </a:solidFill>
@@ -19201,25 +19327,43 @@
               <a:t>if</a:t>
             </a:r>
             <a:r>
-              <a:rPr lang="en-HK" sz="1400">
-                <a:solidFill>
-                  <a:srgbClr val="292929"/>
-                </a:solidFill>
-                <a:latin typeface="Consolas" panose="020B0609020204030204" pitchFamily="49" charset="0"/>
-              </a:rPr>
-              <a:t>(pid </a:t>
-            </a:r>
-            <a:r>
-              <a:rPr lang="en-HK" sz="1400">
+              <a:rPr lang="en-HK" sz="1400" dirty="0">
+                <a:solidFill>
+                  <a:srgbClr val="292929"/>
+                </a:solidFill>
+                <a:latin typeface="Consolas" panose="020B0609020204030204" pitchFamily="49" charset="0"/>
+              </a:rPr>
+              <a:t>(</a:t>
+            </a:r>
+            <a:r>
+              <a:rPr lang="en-HK" sz="1400" dirty="0" err="1">
+                <a:solidFill>
+                  <a:srgbClr val="292929"/>
+                </a:solidFill>
+                <a:latin typeface="Consolas" panose="020B0609020204030204" pitchFamily="49" charset="0"/>
+              </a:rPr>
+              <a:t>pid</a:t>
+            </a:r>
+            <a:r>
+              <a:rPr lang="en-HK" sz="1400" dirty="0">
+                <a:solidFill>
+                  <a:srgbClr val="292929"/>
+                </a:solidFill>
+                <a:latin typeface="Consolas" panose="020B0609020204030204" pitchFamily="49" charset="0"/>
+              </a:rPr>
+              <a:t> </a:t>
+            </a:r>
+            <a:r>
+              <a:rPr lang="en-HK" sz="1400" dirty="0">
                 <a:solidFill>
                   <a:srgbClr val="000000"/>
                 </a:solidFill>
                 <a:latin typeface="Consolas" panose="020B0609020204030204" pitchFamily="49" charset="0"/>
               </a:rPr>
-              <a:t>==</a:t>
-            </a:r>
-            <a:r>
-              <a:rPr lang="en-HK" sz="1400">
+              <a:t>&gt;</a:t>
+            </a:r>
+            <a:r>
+              <a:rPr lang="en-HK" sz="1400" dirty="0">
                 <a:solidFill>
                   <a:srgbClr val="292929"/>
                 </a:solidFill>
@@ -19228,7 +19372,7 @@
               <a:t> </a:t>
             </a:r>
             <a:r>
-              <a:rPr lang="en-HK" sz="1400">
+              <a:rPr lang="en-HK" sz="1400" dirty="0">
                 <a:solidFill>
                   <a:srgbClr val="096D48"/>
                 </a:solidFill>
@@ -19237,7 +19381,7 @@
               <a:t>0</a:t>
             </a:r>
             <a:r>
-              <a:rPr lang="en-HK" sz="1400">
+              <a:rPr lang="en-HK" sz="1400" dirty="0">
                 <a:solidFill>
                   <a:srgbClr val="292929"/>
                 </a:solidFill>
@@ -19248,7 +19392,7 @@
           </a:p>
           <a:p>
             <a:r>
-              <a:rPr lang="en-HK" sz="1400">
+              <a:rPr lang="en-HK" sz="1400" dirty="0">
                 <a:solidFill>
                   <a:srgbClr val="515151"/>
                 </a:solidFill>
@@ -19256,7 +19400,7 @@
               </a:rPr>
               <a:t>        /* parent */</a:t>
             </a:r>
-            <a:endParaRPr lang="en-HK" sz="1400">
+            <a:endParaRPr lang="en-HK" sz="1400" dirty="0">
               <a:solidFill>
                 <a:srgbClr val="292929"/>
               </a:solidFill>
@@ -19265,7 +19409,7 @@
           </a:p>
           <a:p>
             <a:r>
-              <a:rPr lang="en-HK" sz="1400">
+              <a:rPr lang="en-HK" sz="1400" dirty="0">
                 <a:solidFill>
                   <a:srgbClr val="292929"/>
                 </a:solidFill>
@@ -19274,7 +19418,7 @@
               <a:t>        </a:t>
             </a:r>
             <a:r>
-              <a:rPr lang="en-HK" sz="1400">
+              <a:rPr lang="en-HK" sz="1400" dirty="0" err="1">
                 <a:solidFill>
                   <a:srgbClr val="5E2CBC"/>
                 </a:solidFill>
@@ -19283,7 +19427,7 @@
               <a:t>printf</a:t>
             </a:r>
             <a:r>
-              <a:rPr lang="en-HK" sz="1400">
+              <a:rPr lang="en-HK" sz="1400" dirty="0">
                 <a:solidFill>
                   <a:srgbClr val="292929"/>
                 </a:solidFill>
@@ -19292,7 +19436,7 @@
               <a:t>(</a:t>
             </a:r>
             <a:r>
-              <a:rPr lang="en-HK" sz="1400">
+              <a:rPr lang="en-HK" sz="1400" dirty="0">
                 <a:solidFill>
                   <a:srgbClr val="0F4A85"/>
                 </a:solidFill>
@@ -19301,7 +19445,7 @@
               <a:t>"parent is doing something</a:t>
             </a:r>
             <a:r>
-              <a:rPr lang="en-HK" sz="1400">
+              <a:rPr lang="en-HK" sz="1400" dirty="0">
                 <a:solidFill>
                   <a:srgbClr val="EE0000"/>
                 </a:solidFill>
@@ -19310,7 +19454,7 @@
               <a:t>\n</a:t>
             </a:r>
             <a:r>
-              <a:rPr lang="en-HK" sz="1400">
+              <a:rPr lang="en-HK" sz="1400" dirty="0">
                 <a:solidFill>
                   <a:srgbClr val="0F4A85"/>
                 </a:solidFill>
@@ -19319,7 +19463,7 @@
               <a:t>"</a:t>
             </a:r>
             <a:r>
-              <a:rPr lang="en-HK" sz="1400">
+              <a:rPr lang="en-HK" sz="1400" dirty="0">
                 <a:solidFill>
                   <a:srgbClr val="292929"/>
                 </a:solidFill>
@@ -19330,7 +19474,7 @@
           </a:p>
           <a:p>
             <a:r>
-              <a:rPr lang="en-HK" sz="1400">
+              <a:rPr lang="en-HK" sz="1400" dirty="0">
                 <a:solidFill>
                   <a:srgbClr val="292929"/>
                 </a:solidFill>
@@ -19339,7 +19483,7 @@
               <a:t>        </a:t>
             </a:r>
             <a:r>
-              <a:rPr lang="en-HK" sz="1400">
+              <a:rPr lang="en-HK" sz="1400" dirty="0">
                 <a:solidFill>
                   <a:srgbClr val="5E2CBC"/>
                 </a:solidFill>
@@ -19348,7 +19492,7 @@
               <a:t>sleep</a:t>
             </a:r>
             <a:r>
-              <a:rPr lang="en-HK" sz="1400">
+              <a:rPr lang="en-HK" sz="1400" dirty="0">
                 <a:solidFill>
                   <a:srgbClr val="292929"/>
                 </a:solidFill>
@@ -19357,7 +19501,7 @@
               <a:t>(</a:t>
             </a:r>
             <a:r>
-              <a:rPr lang="en-HK" sz="1400">
+              <a:rPr lang="en-HK" sz="1400" dirty="0">
                 <a:solidFill>
                   <a:srgbClr val="096D48"/>
                 </a:solidFill>
@@ -19366,7 +19510,7 @@
               <a:t>5</a:t>
             </a:r>
             <a:r>
-              <a:rPr lang="en-HK" sz="1400">
+              <a:rPr lang="en-HK" sz="1400" dirty="0">
                 <a:solidFill>
                   <a:srgbClr val="292929"/>
                 </a:solidFill>
@@ -19377,7 +19521,7 @@
           </a:p>
           <a:p>
             <a:r>
-              <a:rPr lang="en-HK" sz="1400">
+              <a:rPr lang="en-HK" sz="1400" dirty="0">
                 <a:solidFill>
                   <a:srgbClr val="292929"/>
                 </a:solidFill>
@@ -19386,7 +19530,7 @@
               <a:t>        </a:t>
             </a:r>
             <a:r>
-              <a:rPr lang="en-HK" sz="1400">
+              <a:rPr lang="en-HK" sz="1400" dirty="0" err="1">
                 <a:solidFill>
                   <a:srgbClr val="5E2CBC"/>
                 </a:solidFill>
@@ -19395,7 +19539,7 @@
               <a:t>printf</a:t>
             </a:r>
             <a:r>
-              <a:rPr lang="en-HK" sz="1400">
+              <a:rPr lang="en-HK" sz="1400" dirty="0">
                 <a:solidFill>
                   <a:srgbClr val="292929"/>
                 </a:solidFill>
@@ -19404,7 +19548,7 @@
               <a:t>(</a:t>
             </a:r>
             <a:r>
-              <a:rPr lang="en-HK" sz="1400">
+              <a:rPr lang="en-HK" sz="1400" dirty="0">
                 <a:solidFill>
                   <a:srgbClr val="0F4A85"/>
                 </a:solidFill>
@@ -19413,7 +19557,7 @@
               <a:t>"parent finished its task"</a:t>
             </a:r>
             <a:r>
-              <a:rPr lang="en-HK" sz="1400">
+              <a:rPr lang="en-HK" sz="1400" dirty="0">
                 <a:solidFill>
                   <a:srgbClr val="292929"/>
                 </a:solidFill>
@@ -19424,7 +19568,7 @@
           </a:p>
           <a:p>
             <a:r>
-              <a:rPr lang="en-HK" sz="1400">
+              <a:rPr lang="en-HK" sz="1400" dirty="0">
                 <a:solidFill>
                   <a:srgbClr val="292929"/>
                 </a:solidFill>
@@ -19435,7 +19579,7 @@
           </a:p>
           <a:p>
             <a:r>
-              <a:rPr lang="en-HK" sz="1400">
+              <a:rPr lang="en-HK" sz="1400" dirty="0">
                 <a:solidFill>
                   <a:srgbClr val="292929"/>
                 </a:solidFill>
@@ -19444,7 +19588,7 @@
               <a:t>    </a:t>
             </a:r>
             <a:r>
-              <a:rPr lang="en-HK" sz="1400">
+              <a:rPr lang="en-HK" sz="1400" dirty="0">
                 <a:solidFill>
                   <a:srgbClr val="B5200D"/>
                 </a:solidFill>
@@ -19453,7 +19597,7 @@
               <a:t>else</a:t>
             </a:r>
             <a:r>
-              <a:rPr lang="en-HK" sz="1400">
+              <a:rPr lang="en-HK" sz="1400" dirty="0">
                 <a:solidFill>
                   <a:srgbClr val="292929"/>
                 </a:solidFill>
@@ -19464,7 +19608,7 @@
           </a:p>
           <a:p>
             <a:r>
-              <a:rPr lang="en-HK" sz="1400">
+              <a:rPr lang="en-HK" sz="1400" dirty="0">
                 <a:solidFill>
                   <a:srgbClr val="515151"/>
                 </a:solidFill>
@@ -19472,7 +19616,7 @@
               </a:rPr>
               <a:t>        /* child */</a:t>
             </a:r>
-            <a:endParaRPr lang="en-HK" sz="1400">
+            <a:endParaRPr lang="en-HK" sz="1400" dirty="0">
               <a:solidFill>
                 <a:srgbClr val="292929"/>
               </a:solidFill>
@@ -19481,7 +19625,7 @@
           </a:p>
           <a:p>
             <a:r>
-              <a:rPr lang="en-HK" sz="1400">
+              <a:rPr lang="en-HK" sz="1400" dirty="0">
                 <a:solidFill>
                   <a:srgbClr val="292929"/>
                 </a:solidFill>
@@ -19490,7 +19634,7 @@
               <a:t>        </a:t>
             </a:r>
             <a:r>
-              <a:rPr lang="en-HK" sz="1400">
+              <a:rPr lang="en-HK" sz="1400" dirty="0" err="1">
                 <a:solidFill>
                   <a:srgbClr val="5E2CBC"/>
                 </a:solidFill>
@@ -19499,7 +19643,7 @@
               <a:t>execlp</a:t>
             </a:r>
             <a:r>
-              <a:rPr lang="en-HK" sz="1400">
+              <a:rPr lang="en-HK" sz="1400" dirty="0">
                 <a:solidFill>
                   <a:srgbClr val="292929"/>
                 </a:solidFill>
@@ -19508,16 +19652,43 @@
               <a:t>(</a:t>
             </a:r>
             <a:r>
-              <a:rPr lang="en-HK" sz="1400">
+              <a:rPr lang="en-HK" sz="1400" dirty="0">
                 <a:solidFill>
                   <a:srgbClr val="0F4A85"/>
                 </a:solidFill>
                 <a:latin typeface="Consolas" panose="020B0609020204030204" pitchFamily="49" charset="0"/>
               </a:rPr>
+              <a:t>"</a:t>
+            </a:r>
+            <a:r>
+              <a:rPr lang="en-HK" sz="1400" dirty="0" err="1">
+                <a:solidFill>
+                  <a:srgbClr val="0F4A85"/>
+                </a:solidFill>
+                <a:latin typeface="Consolas" panose="020B0609020204030204" pitchFamily="49" charset="0"/>
+              </a:rPr>
+              <a:t>ls"</a:t>
+            </a:r>
+            <a:r>
+              <a:rPr lang="en-HK" sz="1400" dirty="0" err="1">
+                <a:solidFill>
+                  <a:srgbClr val="292929"/>
+                </a:solidFill>
+                <a:latin typeface="Consolas" panose="020B0609020204030204" pitchFamily="49" charset="0"/>
+              </a:rPr>
+              <a:t>,</a:t>
+            </a:r>
+            <a:r>
+              <a:rPr lang="en-HK" sz="1400" dirty="0" err="1">
+                <a:solidFill>
+                  <a:srgbClr val="0F4A85"/>
+                </a:solidFill>
+                <a:latin typeface="Consolas" panose="020B0609020204030204" pitchFamily="49" charset="0"/>
+              </a:rPr>
               <a:t>"ls"</a:t>
             </a:r>
             <a:r>
-              <a:rPr lang="en-HK" sz="1400">
+              <a:rPr lang="en-HK" sz="1400" dirty="0" err="1">
                 <a:solidFill>
                   <a:srgbClr val="292929"/>
                 </a:solidFill>
@@ -19526,16 +19697,16 @@
               <a:t>,</a:t>
             </a:r>
             <a:r>
-              <a:rPr lang="en-HK" sz="1400">
+              <a:rPr lang="en-HK" sz="1400" dirty="0" err="1">
                 <a:solidFill>
                   <a:srgbClr val="0F4A85"/>
                 </a:solidFill>
                 <a:latin typeface="Consolas" panose="020B0609020204030204" pitchFamily="49" charset="0"/>
               </a:rPr>
-              <a:t>"ls"</a:t>
-            </a:r>
-            <a:r>
-              <a:rPr lang="en-HK" sz="1400">
+              <a:t>"-a"</a:t>
+            </a:r>
+            <a:r>
+              <a:rPr lang="en-HK" sz="1400" dirty="0" err="1">
                 <a:solidFill>
                   <a:srgbClr val="292929"/>
                 </a:solidFill>
@@ -19544,34 +19715,16 @@
               <a:t>,</a:t>
             </a:r>
             <a:r>
-              <a:rPr lang="en-HK" sz="1400">
+              <a:rPr lang="en-HK" sz="1400" dirty="0" err="1">
                 <a:solidFill>
                   <a:srgbClr val="0F4A85"/>
                 </a:solidFill>
                 <a:latin typeface="Consolas" panose="020B0609020204030204" pitchFamily="49" charset="0"/>
               </a:rPr>
-              <a:t>"-a"</a:t>
-            </a:r>
-            <a:r>
-              <a:rPr lang="en-HK" sz="1400">
-                <a:solidFill>
-                  <a:srgbClr val="292929"/>
-                </a:solidFill>
-                <a:latin typeface="Consolas" panose="020B0609020204030204" pitchFamily="49" charset="0"/>
-              </a:rPr>
-              <a:t>,</a:t>
-            </a:r>
-            <a:r>
-              <a:rPr lang="en-HK" sz="1400">
-                <a:solidFill>
-                  <a:srgbClr val="0F4A85"/>
-                </a:solidFill>
-                <a:latin typeface="Consolas" panose="020B0609020204030204" pitchFamily="49" charset="0"/>
-              </a:rPr>
               <a:t>NULL</a:t>
             </a:r>
             <a:r>
-              <a:rPr lang="en-HK" sz="1400">
+              <a:rPr lang="en-HK" sz="1400" dirty="0">
                 <a:solidFill>
                   <a:srgbClr val="292929"/>
                 </a:solidFill>
@@ -19582,7 +19735,7 @@
           </a:p>
           <a:p>
             <a:r>
-              <a:rPr lang="en-HK" sz="1400">
+              <a:rPr lang="en-HK" sz="1400" dirty="0">
                 <a:solidFill>
                   <a:srgbClr val="292929"/>
                 </a:solidFill>
@@ -19593,7 +19746,7 @@
           </a:p>
           <a:p>
             <a:r>
-              <a:rPr lang="en-HK" sz="1400">
+              <a:rPr lang="en-HK" sz="1400" dirty="0">
                 <a:solidFill>
                   <a:srgbClr val="292929"/>
                 </a:solidFill>
@@ -19602,7 +19755,7 @@
               <a:t>    </a:t>
             </a:r>
             <a:r>
-              <a:rPr lang="en-HK" sz="1400">
+              <a:rPr lang="en-HK" sz="1400" dirty="0">
                 <a:solidFill>
                   <a:srgbClr val="B5200D"/>
                 </a:solidFill>
@@ -19611,7 +19764,7 @@
               <a:t>return</a:t>
             </a:r>
             <a:r>
-              <a:rPr lang="en-HK" sz="1400">
+              <a:rPr lang="en-HK" sz="1400" dirty="0">
                 <a:solidFill>
                   <a:srgbClr val="292929"/>
                 </a:solidFill>
@@ -19620,7 +19773,7 @@
               <a:t> </a:t>
             </a:r>
             <a:r>
-              <a:rPr lang="en-HK" sz="1400">
+              <a:rPr lang="en-HK" sz="1400" dirty="0">
                 <a:solidFill>
                   <a:srgbClr val="096D48"/>
                 </a:solidFill>
@@ -19629,7 +19782,7 @@
               <a:t>0</a:t>
             </a:r>
             <a:r>
-              <a:rPr lang="en-HK" sz="1400">
+              <a:rPr lang="en-HK" sz="1400" dirty="0">
                 <a:solidFill>
                   <a:srgbClr val="292929"/>
                 </a:solidFill>
@@ -19640,7 +19793,7 @@
           </a:p>
           <a:p>
             <a:r>
-              <a:rPr lang="en-HK" sz="1400">
+              <a:rPr lang="en-HK" sz="1400" dirty="0">
                 <a:solidFill>
                   <a:srgbClr val="292929"/>
                 </a:solidFill>
